--- a/20261106/python for data analysis.pptx
+++ b/20261106/python for data analysis.pptx
@@ -260,7 +260,7 @@
                 <a:latin typeface="맑은 고딕" panose="020B0503020000020004" pitchFamily="50" charset="-127"/>
                 <a:ea typeface="맑은 고딕" panose="020B0503020000020004" pitchFamily="50" charset="-127"/>
               </a:rPr>
-              <a:t>2026-10-29</a:t>
+              <a:t>2026-10-30</a:t>
             </a:fld>
             <a:endParaRPr lang="ko-KR" altLang="en-US">
               <a:latin typeface="맑은 고딕" panose="020B0503020000020004" pitchFamily="50" charset="-127"/>
@@ -446,7 +446,7 @@
           <a:p>
             <a:fld id="{43E1C3DD-4A19-441D-907C-380838DB51C4}" type="datetime1">
               <a:rPr lang="ko-KR" altLang="en-US" noProof="0" smtClean="0"/>
-              <a:t>2026-10-29</a:t>
+              <a:t>2026-10-30</a:t>
             </a:fld>
             <a:endParaRPr lang="ko-KR" altLang="en-US" noProof="0"/>
           </a:p>
@@ -1542,7 +1542,7 @@
           <a:p>
             <a:fld id="{990475B5-67CA-4281-BDCA-DA943C3C8EB3}" type="datetime1">
               <a:rPr lang="ko-KR" altLang="en-US" noProof="0" smtClean="0"/>
-              <a:t>2026-10-29</a:t>
+              <a:t>2026-10-30</a:t>
             </a:fld>
             <a:endParaRPr lang="ko-KR" altLang="en-US" noProof="0"/>
           </a:p>
@@ -2196,7 +2196,7 @@
           <a:p>
             <a:fld id="{48A87A34-81AB-432B-8DAE-1953F412C126}" type="datetimeFigureOut">
               <a:rPr lang="en-US" smtClean="0"/>
-              <a:t>10/29/2026</a:t>
+              <a:t>10/30/2026</a:t>
             </a:fld>
             <a:endParaRPr lang="en-US" dirty="0"/>
           </a:p>
@@ -2492,7 +2492,7 @@
           <a:p>
             <a:fld id="{C655C81E-72E7-4D05-94B5-F45B321A525D}" type="datetime1">
               <a:rPr lang="ko-KR" altLang="en-US" noProof="0" smtClean="0"/>
-              <a:t>2026-10-29</a:t>
+              <a:t>2026-10-30</a:t>
             </a:fld>
             <a:endParaRPr lang="ko-KR" altLang="en-US" noProof="0" dirty="0">
               <a:latin typeface="맑은 고딕" panose="020B0503020000020004" pitchFamily="50" charset="-127"/>
@@ -7037,7 +7037,7 @@
         <p:spPr>
           <a:xfrm>
             <a:off x="630750" y="1248422"/>
-            <a:ext cx="10930499" cy="4486485"/>
+            <a:ext cx="10930499" cy="3738011"/>
           </a:xfrm>
           <a:prstGeom prst="rect">
             <a:avLst/>
@@ -7058,6 +7058,9 @@
             </a:pPr>
             <a:r>
               <a:rPr lang="en-US" altLang="ko-KR" sz="1600" b="1" dirty="0">
+                <a:solidFill>
+                  <a:srgbClr val="FF0000"/>
+                </a:solidFill>
                 <a:latin typeface="D2Coding" panose="020B0609020101020101" pitchFamily="49" charset="-127"/>
                 <a:ea typeface="D2Coding" panose="020B0609020101020101" pitchFamily="49" charset="-127"/>
               </a:rPr>
@@ -7065,6 +7068,9 @@
             </a:r>
             <a:r>
               <a:rPr lang="ko-KR" altLang="en-US" sz="1600" b="1" dirty="0">
+                <a:solidFill>
+                  <a:srgbClr val="FF0000"/>
+                </a:solidFill>
                 <a:latin typeface="D2Coding" panose="020B0609020101020101" pitchFamily="49" charset="-127"/>
                 <a:ea typeface="D2Coding" panose="020B0609020101020101" pitchFamily="49" charset="-127"/>
               </a:rPr>
@@ -7081,6 +7087,9 @@
             </a:pPr>
             <a:r>
               <a:rPr lang="en-US" altLang="ko-KR" sz="1600" dirty="0">
+                <a:solidFill>
+                  <a:srgbClr val="FF0000"/>
+                </a:solidFill>
                 <a:latin typeface="D2Coding" panose="020B0609020101020101" pitchFamily="49" charset="-127"/>
                 <a:ea typeface="D2Coding" panose="020B0609020101020101" pitchFamily="49" charset="-127"/>
               </a:rPr>
@@ -7088,6 +7097,9 @@
             </a:r>
             <a:r>
               <a:rPr lang="en-US" altLang="ko-KR" sz="1600" dirty="0" err="1">
+                <a:solidFill>
+                  <a:srgbClr val="FF0000"/>
+                </a:solidFill>
                 <a:latin typeface="D2Coding" panose="020B0609020101020101" pitchFamily="49" charset="-127"/>
                 <a:ea typeface="D2Coding" panose="020B0609020101020101" pitchFamily="49" charset="-127"/>
               </a:rPr>
@@ -7095,6 +7107,9 @@
             </a:r>
             <a:r>
               <a:rPr lang="en-US" altLang="ko-KR" sz="1600" dirty="0">
+                <a:solidFill>
+                  <a:srgbClr val="FF0000"/>
+                </a:solidFill>
                 <a:latin typeface="D2Coding" panose="020B0609020101020101" pitchFamily="49" charset="-127"/>
                 <a:ea typeface="D2Coding" panose="020B0609020101020101" pitchFamily="49" charset="-127"/>
               </a:rPr>
@@ -7102,6 +7117,9 @@
             </a:r>
             <a:r>
               <a:rPr lang="ko-KR" altLang="en-US" sz="1600" dirty="0" err="1">
+                <a:solidFill>
+                  <a:srgbClr val="FF0000"/>
+                </a:solidFill>
                 <a:latin typeface="D2Coding" panose="020B0609020101020101" pitchFamily="49" charset="-127"/>
                 <a:ea typeface="D2Coding" panose="020B0609020101020101" pitchFamily="49" charset="-127"/>
               </a:rPr>
@@ -7109,6 +7127,9 @@
             </a:r>
             <a:r>
               <a:rPr lang="ko-KR" altLang="en-US" sz="1600" dirty="0">
+                <a:solidFill>
+                  <a:srgbClr val="FF0000"/>
+                </a:solidFill>
                 <a:latin typeface="D2Coding" panose="020B0609020101020101" pitchFamily="49" charset="-127"/>
                 <a:ea typeface="D2Coding" panose="020B0609020101020101" pitchFamily="49" charset="-127"/>
               </a:rPr>
@@ -7116,6 +7137,9 @@
             </a:r>
             <a:r>
               <a:rPr lang="en-US" altLang="ko-KR" sz="1600" dirty="0">
+                <a:solidFill>
+                  <a:srgbClr val="FF0000"/>
+                </a:solidFill>
                 <a:latin typeface="D2Coding" panose="020B0609020101020101" pitchFamily="49" charset="-127"/>
                 <a:ea typeface="D2Coding" panose="020B0609020101020101" pitchFamily="49" charset="-127"/>
               </a:rPr>
@@ -7123,6 +7147,9 @@
             </a:r>
             <a:r>
               <a:rPr lang="ko-KR" altLang="en-US" sz="1600" dirty="0">
+                <a:solidFill>
+                  <a:srgbClr val="FF0000"/>
+                </a:solidFill>
                 <a:latin typeface="D2Coding" panose="020B0609020101020101" pitchFamily="49" charset="-127"/>
                 <a:ea typeface="D2Coding" panose="020B0609020101020101" pitchFamily="49" charset="-127"/>
               </a:rPr>
@@ -7130,6 +7157,9 @@
             </a:r>
             <a:r>
               <a:rPr lang="en-US" altLang="ko-KR" sz="1600" dirty="0">
+                <a:solidFill>
+                  <a:srgbClr val="FF0000"/>
+                </a:solidFill>
                 <a:latin typeface="D2Coding" panose="020B0609020101020101" pitchFamily="49" charset="-127"/>
                 <a:ea typeface="D2Coding" panose="020B0609020101020101" pitchFamily="49" charset="-127"/>
               </a:rPr>
@@ -7137,12 +7167,18 @@
             </a:r>
             <a:r>
               <a:rPr lang="ko-KR" altLang="en-US" sz="1600" dirty="0">
+                <a:solidFill>
+                  <a:srgbClr val="FF0000"/>
+                </a:solidFill>
                 <a:latin typeface="D2Coding" panose="020B0609020101020101" pitchFamily="49" charset="-127"/>
                 <a:ea typeface="D2Coding" panose="020B0609020101020101" pitchFamily="49" charset="-127"/>
               </a:rPr>
               <a:t>를 판별</a:t>
             </a:r>
             <a:endParaRPr lang="en-US" altLang="ko-KR" sz="1600" dirty="0">
+              <a:solidFill>
+                <a:srgbClr val="FF0000"/>
+              </a:solidFill>
               <a:latin typeface="D2Coding" panose="020B0609020101020101" pitchFamily="49" charset="-127"/>
               <a:ea typeface="D2Coding" panose="020B0609020101020101" pitchFamily="49" charset="-127"/>
             </a:endParaRPr>
@@ -7157,6 +7193,9 @@
             </a:pPr>
             <a:r>
               <a:rPr lang="en-US" altLang="ko-KR" sz="1600" dirty="0" err="1">
+                <a:solidFill>
+                  <a:srgbClr val="FF0000"/>
+                </a:solidFill>
                 <a:latin typeface="D2Coding" panose="020B0609020101020101" pitchFamily="49" charset="-127"/>
                 <a:ea typeface="D2Coding" panose="020B0609020101020101" pitchFamily="49" charset="-127"/>
               </a:rPr>
@@ -7164,6 +7203,9 @@
             </a:r>
             <a:r>
               <a:rPr lang="en-US" altLang="ko-KR" sz="1600" dirty="0">
+                <a:solidFill>
+                  <a:srgbClr val="FF0000"/>
+                </a:solidFill>
                 <a:latin typeface="D2Coding" panose="020B0609020101020101" pitchFamily="49" charset="-127"/>
                 <a:ea typeface="D2Coding" panose="020B0609020101020101" pitchFamily="49" charset="-127"/>
               </a:rPr>
@@ -7171,6 +7213,9 @@
             </a:r>
             <a:r>
               <a:rPr lang="ko-KR" altLang="en-US" sz="1600" dirty="0">
+                <a:solidFill>
+                  <a:srgbClr val="FF0000"/>
+                </a:solidFill>
                 <a:latin typeface="D2Coding" panose="020B0609020101020101" pitchFamily="49" charset="-127"/>
                 <a:ea typeface="D2Coding" panose="020B0609020101020101" pitchFamily="49" charset="-127"/>
               </a:rPr>
@@ -7178,6 +7223,9 @@
             </a:r>
             <a:r>
               <a:rPr lang="en-US" altLang="ko-KR" sz="1600" dirty="0">
+                <a:solidFill>
+                  <a:srgbClr val="FF0000"/>
+                </a:solidFill>
                 <a:latin typeface="D2Coding" panose="020B0609020101020101" pitchFamily="49" charset="-127"/>
                 <a:ea typeface="D2Coding" panose="020B0609020101020101" pitchFamily="49" charset="-127"/>
               </a:rPr>
@@ -7185,6 +7233,9 @@
             </a:r>
             <a:r>
               <a:rPr lang="ko-KR" altLang="en-US" sz="1600" dirty="0">
+                <a:solidFill>
+                  <a:srgbClr val="FF0000"/>
+                </a:solidFill>
                 <a:latin typeface="D2Coding" panose="020B0609020101020101" pitchFamily="49" charset="-127"/>
                 <a:ea typeface="D2Coding" panose="020B0609020101020101" pitchFamily="49" charset="-127"/>
               </a:rPr>
@@ -7192,6 +7243,9 @@
             </a:r>
             <a:r>
               <a:rPr lang="en-US" altLang="ko-KR" sz="1600" dirty="0">
+                <a:solidFill>
+                  <a:srgbClr val="FF0000"/>
+                </a:solidFill>
                 <a:latin typeface="D2Coding" panose="020B0609020101020101" pitchFamily="49" charset="-127"/>
                 <a:ea typeface="D2Coding" panose="020B0609020101020101" pitchFamily="49" charset="-127"/>
               </a:rPr>
@@ -7199,6 +7253,9 @@
             </a:r>
             <a:r>
               <a:rPr lang="ko-KR" altLang="en-US" sz="1600" dirty="0">
+                <a:solidFill>
+                  <a:srgbClr val="FF0000"/>
+                </a:solidFill>
                 <a:latin typeface="D2Coding" panose="020B0609020101020101" pitchFamily="49" charset="-127"/>
                 <a:ea typeface="D2Coding" panose="020B0609020101020101" pitchFamily="49" charset="-127"/>
               </a:rPr>
@@ -7206,6 +7263,9 @@
             </a:r>
             <a:r>
               <a:rPr lang="en-US" altLang="ko-KR" sz="1600" dirty="0">
+                <a:solidFill>
+                  <a:srgbClr val="FF0000"/>
+                </a:solidFill>
                 <a:latin typeface="D2Coding" panose="020B0609020101020101" pitchFamily="49" charset="-127"/>
                 <a:ea typeface="D2Coding" panose="020B0609020101020101" pitchFamily="49" charset="-127"/>
               </a:rPr>
@@ -7213,12 +7273,18 @@
             </a:r>
             <a:r>
               <a:rPr lang="ko-KR" altLang="en-US" sz="1600" dirty="0">
+                <a:solidFill>
+                  <a:srgbClr val="FF0000"/>
+                </a:solidFill>
                 <a:latin typeface="D2Coding" panose="020B0609020101020101" pitchFamily="49" charset="-127"/>
                 <a:ea typeface="D2Coding" panose="020B0609020101020101" pitchFamily="49" charset="-127"/>
               </a:rPr>
               <a:t>조건에 따라 새 컬럼 값을 생성</a:t>
             </a:r>
             <a:endParaRPr lang="en-US" altLang="ko-KR" sz="1600" dirty="0">
+              <a:solidFill>
+                <a:srgbClr val="FF0000"/>
+              </a:solidFill>
               <a:latin typeface="D2Coding" panose="020B0609020101020101" pitchFamily="49" charset="-127"/>
               <a:ea typeface="D2Coding" panose="020B0609020101020101" pitchFamily="49" charset="-127"/>
             </a:endParaRPr>
@@ -7233,6 +7299,9 @@
             </a:pPr>
             <a:r>
               <a:rPr lang="en-US" altLang="ko-KR" sz="1600" dirty="0">
+                <a:solidFill>
+                  <a:srgbClr val="FF0000"/>
+                </a:solidFill>
                 <a:latin typeface="D2Coding" panose="020B0609020101020101" pitchFamily="49" charset="-127"/>
                 <a:ea typeface="D2Coding" panose="020B0609020101020101" pitchFamily="49" charset="-127"/>
               </a:rPr>
@@ -7240,6 +7309,9 @@
             </a:r>
             <a:r>
               <a:rPr lang="ko-KR" altLang="en-US" sz="1600" dirty="0">
+                <a:solidFill>
+                  <a:srgbClr val="FF0000"/>
+                </a:solidFill>
                 <a:latin typeface="D2Coding" panose="020B0609020101020101" pitchFamily="49" charset="-127"/>
                 <a:ea typeface="D2Coding" panose="020B0609020101020101" pitchFamily="49" charset="-127"/>
               </a:rPr>
@@ -7247,6 +7319,9 @@
             </a:r>
             <a:r>
               <a:rPr lang="en-US" altLang="ko-KR" sz="1600" dirty="0" err="1">
+                <a:solidFill>
+                  <a:srgbClr val="FF0000"/>
+                </a:solidFill>
                 <a:latin typeface="D2Coding" panose="020B0609020101020101" pitchFamily="49" charset="-127"/>
                 <a:ea typeface="D2Coding" panose="020B0609020101020101" pitchFamily="49" charset="-127"/>
               </a:rPr>
@@ -7254,12 +7329,18 @@
             </a:r>
             <a:r>
               <a:rPr lang="ko-KR" altLang="en-US" sz="1600" dirty="0">
+                <a:solidFill>
+                  <a:srgbClr val="FF0000"/>
+                </a:solidFill>
                 <a:latin typeface="D2Coding" panose="020B0609020101020101" pitchFamily="49" charset="-127"/>
                 <a:ea typeface="D2Coding" panose="020B0609020101020101" pitchFamily="49" charset="-127"/>
               </a:rPr>
               <a:t>을 복사</a:t>
             </a:r>
             <a:endParaRPr lang="en-US" altLang="ko-KR" sz="1600" dirty="0">
+              <a:solidFill>
+                <a:srgbClr val="FF0000"/>
+              </a:solidFill>
               <a:latin typeface="D2Coding" panose="020B0609020101020101" pitchFamily="49" charset="-127"/>
               <a:ea typeface="D2Coding" panose="020B0609020101020101" pitchFamily="49" charset="-127"/>
             </a:endParaRPr>
@@ -7273,6 +7354,9 @@
               <a:buChar char="§"/>
             </a:pPr>
             <a:endParaRPr lang="en-US" altLang="ko-KR" sz="1600" dirty="0">
+              <a:solidFill>
+                <a:srgbClr val="FF0000"/>
+              </a:solidFill>
               <a:latin typeface="D2Coding" panose="020B0609020101020101" pitchFamily="49" charset="-127"/>
               <a:ea typeface="D2Coding" panose="020B0609020101020101" pitchFamily="49" charset="-127"/>
             </a:endParaRPr>
@@ -7286,6 +7370,9 @@
             </a:pPr>
             <a:r>
               <a:rPr lang="en-US" altLang="ko-KR" sz="1600" b="1" dirty="0">
+                <a:solidFill>
+                  <a:srgbClr val="FF0000"/>
+                </a:solidFill>
                 <a:latin typeface="D2Coding" panose="020B0609020101020101" pitchFamily="49" charset="-127"/>
                 <a:ea typeface="D2Coding" panose="020B0609020101020101" pitchFamily="49" charset="-127"/>
               </a:rPr>
@@ -7293,6 +7380,9 @@
             </a:r>
             <a:r>
               <a:rPr lang="ko-KR" altLang="en-US" sz="1600" b="1" dirty="0">
+                <a:solidFill>
+                  <a:srgbClr val="FF0000"/>
+                </a:solidFill>
                 <a:latin typeface="D2Coding" panose="020B0609020101020101" pitchFamily="49" charset="-127"/>
                 <a:ea typeface="D2Coding" panose="020B0609020101020101" pitchFamily="49" charset="-127"/>
               </a:rPr>
@@ -7300,6 +7390,9 @@
             </a:r>
             <a:r>
               <a:rPr lang="en-US" altLang="ko-KR" sz="1600" b="1" dirty="0">
+                <a:solidFill>
+                  <a:srgbClr val="FF0000"/>
+                </a:solidFill>
                 <a:latin typeface="D2Coding" panose="020B0609020101020101" pitchFamily="49" charset="-127"/>
                 <a:ea typeface="D2Coding" panose="020B0609020101020101" pitchFamily="49" charset="-127"/>
               </a:rPr>
@@ -7307,6 +7400,9 @@
             </a:r>
             <a:r>
               <a:rPr lang="ko-KR" altLang="en-US" sz="1600" b="1" dirty="0">
+                <a:solidFill>
+                  <a:srgbClr val="FF0000"/>
+                </a:solidFill>
                 <a:latin typeface="D2Coding" panose="020B0609020101020101" pitchFamily="49" charset="-127"/>
                 <a:ea typeface="D2Coding" panose="020B0609020101020101" pitchFamily="49" charset="-127"/>
               </a:rPr>
@@ -7314,6 +7410,9 @@
             </a:r>
             <a:r>
               <a:rPr lang="en-US" altLang="ko-KR" sz="1600" b="1" dirty="0">
+                <a:solidFill>
+                  <a:srgbClr val="FF0000"/>
+                </a:solidFill>
                 <a:latin typeface="D2Coding" panose="020B0609020101020101" pitchFamily="49" charset="-127"/>
                 <a:ea typeface="D2Coding" panose="020B0609020101020101" pitchFamily="49" charset="-127"/>
               </a:rPr>
@@ -7330,6 +7429,9 @@
             </a:pPr>
             <a:r>
               <a:rPr lang="en-US" altLang="ko-KR" sz="1600" dirty="0" err="1">
+                <a:solidFill>
+                  <a:srgbClr val="FF0000"/>
+                </a:solidFill>
                 <a:latin typeface="D2Coding" panose="020B0609020101020101" pitchFamily="49" charset="-127"/>
                 <a:ea typeface="D2Coding" panose="020B0609020101020101" pitchFamily="49" charset="-127"/>
               </a:rPr>
@@ -7337,6 +7439,9 @@
             </a:r>
             <a:r>
               <a:rPr lang="en-US" altLang="ko-KR" sz="1600" dirty="0">
+                <a:solidFill>
+                  <a:srgbClr val="FF0000"/>
+                </a:solidFill>
                 <a:latin typeface="D2Coding" panose="020B0609020101020101" pitchFamily="49" charset="-127"/>
                 <a:ea typeface="D2Coding" panose="020B0609020101020101" pitchFamily="49" charset="-127"/>
               </a:rPr>
@@ -7344,6 +7449,9 @@
             </a:r>
             <a:r>
               <a:rPr lang="en-US" altLang="ko-KR" sz="1600" dirty="0" err="1">
+                <a:solidFill>
+                  <a:srgbClr val="FF0000"/>
+                </a:solidFill>
                 <a:latin typeface="D2Coding" panose="020B0609020101020101" pitchFamily="49" charset="-127"/>
                 <a:ea typeface="D2Coding" panose="020B0609020101020101" pitchFamily="49" charset="-127"/>
               </a:rPr>
@@ -7351,6 +7459,9 @@
             </a:r>
             <a:r>
               <a:rPr lang="en-US" altLang="ko-KR" sz="1600" dirty="0">
+                <a:solidFill>
+                  <a:srgbClr val="FF0000"/>
+                </a:solidFill>
                 <a:latin typeface="D2Coding" panose="020B0609020101020101" pitchFamily="49" charset="-127"/>
                 <a:ea typeface="D2Coding" panose="020B0609020101020101" pitchFamily="49" charset="-127"/>
               </a:rPr>
@@ -7358,6 +7469,9 @@
             </a:r>
             <a:r>
               <a:rPr lang="en-US" altLang="ko-KR" sz="1600" dirty="0" err="1">
+                <a:solidFill>
+                  <a:srgbClr val="FF0000"/>
+                </a:solidFill>
                 <a:latin typeface="D2Coding" panose="020B0609020101020101" pitchFamily="49" charset="-127"/>
                 <a:ea typeface="D2Coding" panose="020B0609020101020101" pitchFamily="49" charset="-127"/>
               </a:rPr>
@@ -7365,6 +7479,9 @@
             </a:r>
             <a:r>
               <a:rPr lang="en-US" altLang="ko-KR" sz="1600" dirty="0">
+                <a:solidFill>
+                  <a:srgbClr val="FF0000"/>
+                </a:solidFill>
                 <a:latin typeface="D2Coding" panose="020B0609020101020101" pitchFamily="49" charset="-127"/>
                 <a:ea typeface="D2Coding" panose="020B0609020101020101" pitchFamily="49" charset="-127"/>
               </a:rPr>
@@ -7372,6 +7489,9 @@
             </a:r>
             <a:r>
               <a:rPr lang="ko-KR" altLang="en-US" sz="1600" dirty="0">
+                <a:solidFill>
+                  <a:srgbClr val="FF0000"/>
+                </a:solidFill>
                 <a:latin typeface="D2Coding" panose="020B0609020101020101" pitchFamily="49" charset="-127"/>
                 <a:ea typeface="D2Coding" panose="020B0609020101020101" pitchFamily="49" charset="-127"/>
               </a:rPr>
@@ -7379,6 +7499,9 @@
             </a:r>
             <a:r>
               <a:rPr lang="en-US" altLang="ko-KR" sz="1600" dirty="0">
+                <a:solidFill>
+                  <a:srgbClr val="FF0000"/>
+                </a:solidFill>
                 <a:latin typeface="D2Coding" panose="020B0609020101020101" pitchFamily="49" charset="-127"/>
                 <a:ea typeface="D2Coding" panose="020B0609020101020101" pitchFamily="49" charset="-127"/>
               </a:rPr>
@@ -7386,6 +7509,9 @@
             </a:r>
             <a:r>
               <a:rPr lang="en-US" altLang="ko-KR" sz="1600" dirty="0" err="1">
+                <a:solidFill>
+                  <a:srgbClr val="FF0000"/>
+                </a:solidFill>
                 <a:latin typeface="D2Coding" panose="020B0609020101020101" pitchFamily="49" charset="-127"/>
                 <a:ea typeface="D2Coding" panose="020B0609020101020101" pitchFamily="49" charset="-127"/>
               </a:rPr>
@@ -7393,6 +7519,9 @@
             </a:r>
             <a:r>
               <a:rPr lang="en-US" altLang="ko-KR" sz="1600" dirty="0">
+                <a:solidFill>
+                  <a:srgbClr val="FF0000"/>
+                </a:solidFill>
                 <a:latin typeface="D2Coding" panose="020B0609020101020101" pitchFamily="49" charset="-127"/>
                 <a:ea typeface="D2Coding" panose="020B0609020101020101" pitchFamily="49" charset="-127"/>
               </a:rPr>
@@ -7400,12 +7529,18 @@
             </a:r>
             <a:r>
               <a:rPr lang="ko-KR" altLang="en-US" sz="1600" dirty="0">
+                <a:solidFill>
+                  <a:srgbClr val="FF0000"/>
+                </a:solidFill>
                 <a:latin typeface="D2Coding" panose="020B0609020101020101" pitchFamily="49" charset="-127"/>
                 <a:ea typeface="D2Coding" panose="020B0609020101020101" pitchFamily="49" charset="-127"/>
               </a:rPr>
               <a:t>그룹별 건수를 피벗 형태로 변경</a:t>
             </a:r>
             <a:endParaRPr lang="en-US" altLang="ko-KR" sz="1600" dirty="0">
+              <a:solidFill>
+                <a:srgbClr val="FF0000"/>
+              </a:solidFill>
               <a:latin typeface="D2Coding" panose="020B0609020101020101" pitchFamily="49" charset="-127"/>
               <a:ea typeface="D2Coding" panose="020B0609020101020101" pitchFamily="49" charset="-127"/>
             </a:endParaRPr>
@@ -7420,6 +7555,9 @@
             </a:pPr>
             <a:r>
               <a:rPr lang="en-US" altLang="ko-KR" sz="1600" dirty="0" err="1">
+                <a:solidFill>
+                  <a:srgbClr val="FF0000"/>
+                </a:solidFill>
                 <a:latin typeface="D2Coding" panose="020B0609020101020101" pitchFamily="49" charset="-127"/>
                 <a:ea typeface="D2Coding" panose="020B0609020101020101" pitchFamily="49" charset="-127"/>
               </a:rPr>
@@ -7427,6 +7565,9 @@
             </a:r>
             <a:r>
               <a:rPr lang="en-US" altLang="ko-KR" sz="1600" dirty="0">
+                <a:solidFill>
+                  <a:srgbClr val="FF0000"/>
+                </a:solidFill>
                 <a:latin typeface="D2Coding" panose="020B0609020101020101" pitchFamily="49" charset="-127"/>
                 <a:ea typeface="D2Coding" panose="020B0609020101020101" pitchFamily="49" charset="-127"/>
               </a:rPr>
@@ -7434,6 +7575,9 @@
             </a:r>
             <a:r>
               <a:rPr lang="ko-KR" altLang="en-US" sz="1600" dirty="0">
+                <a:solidFill>
+                  <a:srgbClr val="FF0000"/>
+                </a:solidFill>
                 <a:latin typeface="D2Coding" panose="020B0609020101020101" pitchFamily="49" charset="-127"/>
                 <a:ea typeface="D2Coding" panose="020B0609020101020101" pitchFamily="49" charset="-127"/>
               </a:rPr>
@@ -7441,6 +7585,9 @@
             </a:r>
             <a:r>
               <a:rPr lang="en-US" altLang="ko-KR" sz="1600" dirty="0">
+                <a:solidFill>
+                  <a:srgbClr val="FF0000"/>
+                </a:solidFill>
                 <a:latin typeface="D2Coding" panose="020B0609020101020101" pitchFamily="49" charset="-127"/>
                 <a:ea typeface="D2Coding" panose="020B0609020101020101" pitchFamily="49" charset="-127"/>
               </a:rPr>
@@ -7448,6 +7595,9 @@
             </a:r>
             <a:r>
               <a:rPr lang="ko-KR" altLang="en-US" sz="1600" dirty="0">
+                <a:solidFill>
+                  <a:srgbClr val="FF0000"/>
+                </a:solidFill>
                 <a:latin typeface="D2Coding" panose="020B0609020101020101" pitchFamily="49" charset="-127"/>
                 <a:ea typeface="D2Coding" panose="020B0609020101020101" pitchFamily="49" charset="-127"/>
               </a:rPr>
@@ -7455,6 +7605,9 @@
             </a:r>
             <a:r>
               <a:rPr lang="en-US" altLang="ko-KR" sz="1600" dirty="0" err="1">
+                <a:solidFill>
+                  <a:srgbClr val="FF0000"/>
+                </a:solidFill>
                 <a:latin typeface="D2Coding" panose="020B0609020101020101" pitchFamily="49" charset="-127"/>
                 <a:ea typeface="D2Coding" panose="020B0609020101020101" pitchFamily="49" charset="-127"/>
               </a:rPr>
@@ -7462,6 +7615,9 @@
             </a:r>
             <a:r>
               <a:rPr lang="en-US" altLang="ko-KR" sz="1600" dirty="0">
+                <a:solidFill>
+                  <a:srgbClr val="FF0000"/>
+                </a:solidFill>
                 <a:latin typeface="D2Coding" panose="020B0609020101020101" pitchFamily="49" charset="-127"/>
                 <a:ea typeface="D2Coding" panose="020B0609020101020101" pitchFamily="49" charset="-127"/>
               </a:rPr>
@@ -7469,12 +7625,18 @@
             </a:r>
             <a:r>
               <a:rPr lang="ko-KR" altLang="en-US" sz="1600" dirty="0">
+                <a:solidFill>
+                  <a:srgbClr val="FF0000"/>
+                </a:solidFill>
                 <a:latin typeface="D2Coding" panose="020B0609020101020101" pitchFamily="49" charset="-127"/>
                 <a:ea typeface="D2Coding" panose="020B0609020101020101" pitchFamily="49" charset="-127"/>
               </a:rPr>
               <a:t>같은 일을 더 간단하게 처리</a:t>
             </a:r>
             <a:endParaRPr lang="en-US" altLang="ko-KR" sz="1600" dirty="0">
+              <a:solidFill>
+                <a:srgbClr val="FF0000"/>
+              </a:solidFill>
               <a:latin typeface="D2Coding" panose="020B0609020101020101" pitchFamily="49" charset="-127"/>
               <a:ea typeface="D2Coding" panose="020B0609020101020101" pitchFamily="49" charset="-127"/>
             </a:endParaRPr>
@@ -7489,6 +7651,9 @@
             </a:pPr>
             <a:r>
               <a:rPr lang="en-US" altLang="ko-KR" sz="1600" dirty="0">
+                <a:solidFill>
+                  <a:srgbClr val="FF0000"/>
+                </a:solidFill>
                 <a:latin typeface="D2Coding" panose="020B0609020101020101" pitchFamily="49" charset="-127"/>
                 <a:ea typeface="D2Coding" panose="020B0609020101020101" pitchFamily="49" charset="-127"/>
               </a:rPr>
@@ -7496,6 +7661,9 @@
             </a:r>
             <a:r>
               <a:rPr lang="en-US" altLang="ko-KR" sz="1600" dirty="0" err="1">
+                <a:solidFill>
+                  <a:srgbClr val="FF0000"/>
+                </a:solidFill>
                 <a:latin typeface="D2Coding" panose="020B0609020101020101" pitchFamily="49" charset="-127"/>
                 <a:ea typeface="D2Coding" panose="020B0609020101020101" pitchFamily="49" charset="-127"/>
               </a:rPr>
@@ -7503,6 +7671,9 @@
             </a:r>
             <a:r>
               <a:rPr lang="en-US" altLang="ko-KR" sz="1600" dirty="0">
+                <a:solidFill>
+                  <a:srgbClr val="FF0000"/>
+                </a:solidFill>
                 <a:latin typeface="D2Coding" panose="020B0609020101020101" pitchFamily="49" charset="-127"/>
                 <a:ea typeface="D2Coding" panose="020B0609020101020101" pitchFamily="49" charset="-127"/>
               </a:rPr>
@@ -7510,6 +7681,9 @@
             </a:r>
             <a:r>
               <a:rPr lang="ko-KR" altLang="en-US" sz="1600" dirty="0">
+                <a:solidFill>
+                  <a:srgbClr val="FF0000"/>
+                </a:solidFill>
                 <a:latin typeface="D2Coding" panose="020B0609020101020101" pitchFamily="49" charset="-127"/>
                 <a:ea typeface="D2Coding" panose="020B0609020101020101" pitchFamily="49" charset="-127"/>
               </a:rPr>
@@ -7517,6 +7691,9 @@
             </a:r>
             <a:r>
               <a:rPr lang="en-US" altLang="ko-KR" sz="1600" dirty="0">
+                <a:solidFill>
+                  <a:srgbClr val="FF0000"/>
+                </a:solidFill>
                 <a:latin typeface="D2Coding" panose="020B0609020101020101" pitchFamily="49" charset="-127"/>
                 <a:ea typeface="D2Coding" panose="020B0609020101020101" pitchFamily="49" charset="-127"/>
               </a:rPr>
@@ -7524,12 +7701,18 @@
             </a:r>
             <a:r>
               <a:rPr lang="ko-KR" altLang="en-US" sz="1600" dirty="0">
+                <a:solidFill>
+                  <a:srgbClr val="FF0000"/>
+                </a:solidFill>
                 <a:latin typeface="D2Coding" panose="020B0609020101020101" pitchFamily="49" charset="-127"/>
                 <a:ea typeface="D2Coding" panose="020B0609020101020101" pitchFamily="49" charset="-127"/>
               </a:rPr>
               <a:t>형태</a:t>
             </a:r>
             <a:endParaRPr lang="en-US" altLang="ko-KR" sz="1600" dirty="0">
+              <a:solidFill>
+                <a:srgbClr val="FF0000"/>
+              </a:solidFill>
               <a:latin typeface="D2Coding" panose="020B0609020101020101" pitchFamily="49" charset="-127"/>
               <a:ea typeface="D2Coding" panose="020B0609020101020101" pitchFamily="49" charset="-127"/>
             </a:endParaRPr>
@@ -7544,6 +7727,9 @@
             </a:pPr>
             <a:r>
               <a:rPr lang="en-US" altLang="ko-KR" sz="1600" dirty="0" err="1">
+                <a:solidFill>
+                  <a:srgbClr val="FF0000"/>
+                </a:solidFill>
                 <a:latin typeface="D2Coding" panose="020B0609020101020101" pitchFamily="49" charset="-127"/>
                 <a:ea typeface="D2Coding" panose="020B0609020101020101" pitchFamily="49" charset="-127"/>
               </a:rPr>
@@ -7551,6 +7737,9 @@
             </a:r>
             <a:r>
               <a:rPr lang="en-US" altLang="ko-KR" sz="1600" dirty="0">
+                <a:solidFill>
+                  <a:srgbClr val="FF0000"/>
+                </a:solidFill>
                 <a:latin typeface="D2Coding" panose="020B0609020101020101" pitchFamily="49" charset="-127"/>
                 <a:ea typeface="D2Coding" panose="020B0609020101020101" pitchFamily="49" charset="-127"/>
               </a:rPr>
@@ -7558,6 +7747,9 @@
             </a:r>
             <a:r>
               <a:rPr lang="ko-KR" altLang="en-US" sz="1600" dirty="0">
+                <a:solidFill>
+                  <a:srgbClr val="FF0000"/>
+                </a:solidFill>
                 <a:latin typeface="D2Coding" panose="020B0609020101020101" pitchFamily="49" charset="-127"/>
                 <a:ea typeface="D2Coding" panose="020B0609020101020101" pitchFamily="49" charset="-127"/>
               </a:rPr>
@@ -7565,6 +7757,9 @@
             </a:r>
             <a:r>
               <a:rPr lang="en-US" altLang="ko-KR" sz="1600" dirty="0">
+                <a:solidFill>
+                  <a:srgbClr val="FF0000"/>
+                </a:solidFill>
                 <a:latin typeface="D2Coding" panose="020B0609020101020101" pitchFamily="49" charset="-127"/>
                 <a:ea typeface="D2Coding" panose="020B0609020101020101" pitchFamily="49" charset="-127"/>
               </a:rPr>
@@ -7572,6 +7767,9 @@
             </a:r>
             <a:r>
               <a:rPr lang="ko-KR" altLang="en-US" sz="1600" dirty="0">
+                <a:solidFill>
+                  <a:srgbClr val="FF0000"/>
+                </a:solidFill>
                 <a:latin typeface="D2Coding" panose="020B0609020101020101" pitchFamily="49" charset="-127"/>
                 <a:ea typeface="D2Coding" panose="020B0609020101020101" pitchFamily="49" charset="-127"/>
               </a:rPr>
@@ -7579,6 +7777,9 @@
             </a:r>
             <a:r>
               <a:rPr lang="en-US" altLang="ko-KR" sz="1600" dirty="0" err="1">
+                <a:solidFill>
+                  <a:srgbClr val="FF0000"/>
+                </a:solidFill>
                 <a:latin typeface="D2Coding" panose="020B0609020101020101" pitchFamily="49" charset="-127"/>
                 <a:ea typeface="D2Coding" panose="020B0609020101020101" pitchFamily="49" charset="-127"/>
               </a:rPr>
@@ -7586,6 +7787,9 @@
             </a:r>
             <a:r>
               <a:rPr lang="en-US" altLang="ko-KR" sz="1600" dirty="0">
+                <a:solidFill>
+                  <a:srgbClr val="FF0000"/>
+                </a:solidFill>
                 <a:latin typeface="D2Coding" panose="020B0609020101020101" pitchFamily="49" charset="-127"/>
                 <a:ea typeface="D2Coding" panose="020B0609020101020101" pitchFamily="49" charset="-127"/>
               </a:rPr>
@@ -7593,6 +7797,9 @@
             </a:r>
             <a:r>
               <a:rPr lang="ko-KR" altLang="en-US" sz="1600" dirty="0">
+                <a:solidFill>
+                  <a:srgbClr val="FF0000"/>
+                </a:solidFill>
                 <a:latin typeface="D2Coding" panose="020B0609020101020101" pitchFamily="49" charset="-127"/>
                 <a:ea typeface="D2Coding" panose="020B0609020101020101" pitchFamily="49" charset="-127"/>
               </a:rPr>
@@ -7600,6 +7807,9 @@
             </a:r>
             <a:r>
               <a:rPr lang="en-US" altLang="ko-KR" sz="1600" dirty="0">
+                <a:solidFill>
+                  <a:srgbClr val="FF0000"/>
+                </a:solidFill>
                 <a:latin typeface="D2Coding" panose="020B0609020101020101" pitchFamily="49" charset="-127"/>
                 <a:ea typeface="D2Coding" panose="020B0609020101020101" pitchFamily="49" charset="-127"/>
               </a:rPr>
@@ -7607,6 +7817,9 @@
             </a:r>
             <a:r>
               <a:rPr lang="ko-KR" altLang="en-US" sz="1600" dirty="0">
+                <a:solidFill>
+                  <a:srgbClr val="FF0000"/>
+                </a:solidFill>
                 <a:latin typeface="D2Coding" panose="020B0609020101020101" pitchFamily="49" charset="-127"/>
                 <a:ea typeface="D2Coding" panose="020B0609020101020101" pitchFamily="49" charset="-127"/>
               </a:rPr>
@@ -7614,6 +7827,9 @@
             </a:r>
             <a:r>
               <a:rPr lang="en-US" altLang="ko-KR" sz="1600" dirty="0">
+                <a:solidFill>
+                  <a:srgbClr val="FF0000"/>
+                </a:solidFill>
                 <a:latin typeface="D2Coding" panose="020B0609020101020101" pitchFamily="49" charset="-127"/>
                 <a:ea typeface="D2Coding" panose="020B0609020101020101" pitchFamily="49" charset="-127"/>
               </a:rPr>
@@ -7621,12 +7837,18 @@
             </a:r>
             <a:r>
               <a:rPr lang="ko-KR" altLang="en-US" sz="1600" dirty="0">
+                <a:solidFill>
+                  <a:srgbClr val="FF0000"/>
+                </a:solidFill>
                 <a:latin typeface="D2Coding" panose="020B0609020101020101" pitchFamily="49" charset="-127"/>
                 <a:ea typeface="D2Coding" panose="020B0609020101020101" pitchFamily="49" charset="-127"/>
               </a:rPr>
               <a:t>을 계산</a:t>
             </a:r>
             <a:endParaRPr lang="en-US" altLang="ko-KR" sz="1600" dirty="0">
+              <a:solidFill>
+                <a:srgbClr val="FF0000"/>
+              </a:solidFill>
               <a:latin typeface="D2Coding" panose="020B0609020101020101" pitchFamily="49" charset="-127"/>
               <a:ea typeface="D2Coding" panose="020B0609020101020101" pitchFamily="49" charset="-127"/>
             </a:endParaRPr>
